--- a/public/fun/cards/finance/명함_금융보험부동산_08_사파이어.pptx
+++ b/public/fun/cards/finance/명함_금융보험부동산_08_사파이어.pptx
@@ -3723,8 +3723,8 @@
         </p:nvSpPr>
         <p:spPr>
           <a:xfrm>
-            <a:off x="252000" y="424800"/>
-            <a:ext cx="540000" cy="237600"/>
+            <a:off x="252000" y="496800"/>
+            <a:ext cx="360000" cy="144000"/>
           </a:xfrm>
           <a:prstGeom prst="rect">
             <a:avLst/>
@@ -3739,11 +3739,11 @@
           <a:p>
             <a:pPr algn="l">
               <a:lnSpc>
-                <a:spcPts val="2175"/>
+                <a:spcPts val="927"/>
               </a:lnSpc>
             </a:pPr>
             <a:r>
-              <a:rPr sz="1500" b="1">
+              <a:rPr sz="640" b="1" spc="120">
                 <a:solidFill>
                   <a:srgbClr val="A67C45"/>
                 </a:solidFill>
@@ -3763,8 +3763,8 @@
         </p:nvSpPr>
         <p:spPr>
           <a:xfrm>
-            <a:off x="720000" y="475200"/>
-            <a:ext cx="1512000" cy="180000"/>
+            <a:off x="576000" y="475200"/>
+            <a:ext cx="1656000" cy="180000"/>
           </a:xfrm>
           <a:prstGeom prst="rect">
             <a:avLst/>
@@ -3803,8 +3803,8 @@
         </p:nvSpPr>
         <p:spPr>
           <a:xfrm>
-            <a:off x="252000" y="691200"/>
-            <a:ext cx="540000" cy="237600"/>
+            <a:off x="252000" y="763200"/>
+            <a:ext cx="360000" cy="144000"/>
           </a:xfrm>
           <a:prstGeom prst="rect">
             <a:avLst/>
@@ -3819,11 +3819,11 @@
           <a:p>
             <a:pPr algn="l">
               <a:lnSpc>
-                <a:spcPts val="2175"/>
+                <a:spcPts val="927"/>
               </a:lnSpc>
             </a:pPr>
             <a:r>
-              <a:rPr sz="1500" b="1">
+              <a:rPr sz="640" b="1" spc="120">
                 <a:solidFill>
                   <a:srgbClr val="A67C45"/>
                 </a:solidFill>
@@ -3843,8 +3843,8 @@
         </p:nvSpPr>
         <p:spPr>
           <a:xfrm>
-            <a:off x="720000" y="741600"/>
-            <a:ext cx="1512000" cy="180000"/>
+            <a:off x="576000" y="741600"/>
+            <a:ext cx="1656000" cy="180000"/>
           </a:xfrm>
           <a:prstGeom prst="rect">
             <a:avLst/>
@@ -3883,8 +3883,8 @@
         </p:nvSpPr>
         <p:spPr>
           <a:xfrm>
-            <a:off x="252000" y="957600"/>
-            <a:ext cx="540000" cy="237600"/>
+            <a:off x="252000" y="1029600"/>
+            <a:ext cx="360000" cy="144000"/>
           </a:xfrm>
           <a:prstGeom prst="rect">
             <a:avLst/>
@@ -3899,11 +3899,11 @@
           <a:p>
             <a:pPr algn="l">
               <a:lnSpc>
-                <a:spcPts val="2175"/>
+                <a:spcPts val="927"/>
               </a:lnSpc>
             </a:pPr>
             <a:r>
-              <a:rPr sz="1500" b="1">
+              <a:rPr sz="640" b="1" spc="120">
                 <a:solidFill>
                   <a:srgbClr val="A67C45"/>
                 </a:solidFill>
@@ -3923,8 +3923,8 @@
         </p:nvSpPr>
         <p:spPr>
           <a:xfrm>
-            <a:off x="720000" y="1008000"/>
-            <a:ext cx="1512000" cy="180000"/>
+            <a:off x="576000" y="1008000"/>
+            <a:ext cx="1656000" cy="180000"/>
           </a:xfrm>
           <a:prstGeom prst="rect">
             <a:avLst/>
@@ -3963,8 +3963,8 @@
         </p:nvSpPr>
         <p:spPr>
           <a:xfrm>
-            <a:off x="252000" y="1224000"/>
-            <a:ext cx="540000" cy="237600"/>
+            <a:off x="252000" y="1296000"/>
+            <a:ext cx="360000" cy="144000"/>
           </a:xfrm>
           <a:prstGeom prst="rect">
             <a:avLst/>
@@ -3979,11 +3979,11 @@
           <a:p>
             <a:pPr algn="l">
               <a:lnSpc>
-                <a:spcPts val="2175"/>
+                <a:spcPts val="927"/>
               </a:lnSpc>
             </a:pPr>
             <a:r>
-              <a:rPr sz="1500" b="1">
+              <a:rPr sz="640" b="1" spc="120">
                 <a:solidFill>
                   <a:srgbClr val="A67C45"/>
                 </a:solidFill>
@@ -4003,8 +4003,8 @@
         </p:nvSpPr>
         <p:spPr>
           <a:xfrm>
-            <a:off x="720000" y="1274400"/>
-            <a:ext cx="1512000" cy="180000"/>
+            <a:off x="576000" y="1274400"/>
+            <a:ext cx="1656000" cy="180000"/>
           </a:xfrm>
           <a:prstGeom prst="rect">
             <a:avLst/>
